--- a/株式会社カナリア/株式会社カナリア_会社分割スキームの整理_260728.pptx
+++ b/株式会社カナリア/株式会社カナリア_会社分割スキームの整理_260728.pptx
@@ -9,6 +9,7 @@
   </p:notesMasterIdLst>
   <p:sldIdLst>
     <p:sldId id="267" r:id="rId2"/>
+    <p:sldId id="272" r:id="rId23"/>
     <p:sldId id="269" r:id="rId6"/>
     <p:sldId id="270" r:id="rId7"/>
     <p:sldId id="271" r:id="rId8"/>
@@ -10494,6 +10495,1377 @@
                 <a:latin typeface="Meiryo UI" panose="020B0604030504040204" pitchFamily="50" charset="-128"/>
                 <a:ea typeface="Meiryo UI" panose="020B0604030504040204" pitchFamily="50" charset="-128"/>
               </a:rPr>
+              <a:t>譲渡スキーム（イメージ）</a:t>
+            </a:r>
+            <a:endParaRPr b="1" dirty="0">
+              <a:solidFill>
+                <a:srgbClr val="5A5A5A"/>
+              </a:solidFill>
+              <a:latin typeface="Meiryo UI" panose="020B0604030504040204" pitchFamily="50" charset="-128"/>
+              <a:ea typeface="Meiryo UI" panose="020B0604030504040204" pitchFamily="50" charset="-128"/>
+              <a:sym typeface="Arial"/>
+            </a:endParaRPr>
+          </a:p>
+        </p:txBody>
+      </p:sp>
+      <p:sp>
+        <p:nvSpPr>
+          <p:cNvPr id="205" name="Google Shape;205;p3">
+            <a:extLst>
+              <a:ext uri="{FF2B5EF4-FFF2-40B4-BE49-F238E27FC236}">
+                <a16:creationId xmlns:a16="http://schemas.microsoft.com/office/drawing/2014/main" id="{0791AE04-3419-00F0-CF2E-98FACC0E01B1}"/>
+              </a:ext>
+            </a:extLst>
+          </p:cNvPr>
+          <p:cNvSpPr txBox="1"/>
+          <p:nvPr/>
+        </p:nvSpPr>
+        <p:spPr>
+          <a:xfrm>
+            <a:off x="323528" y="116632"/>
+            <a:ext cx="2376264" cy="188640"/>
+          </a:xfrm>
+          <a:prstGeom prst="rect">
+            <a:avLst/>
+          </a:prstGeom>
+          <a:noFill/>
+          <a:ln>
+            <a:noFill/>
+          </a:ln>
+        </p:spPr>
+        <p:txBody>
+          <a:bodyPr spcFirstLastPara="1" wrap="square" lIns="36000" tIns="0" rIns="0" bIns="0" anchor="ctr" anchorCtr="0">
+            <a:noAutofit/>
+          </a:bodyPr>
+          <a:lstStyle/>
+          <a:p>
+            <a:pPr marL="0" marR="0" lvl="0" indent="0" algn="l" rtl="0">
+              <a:lnSpc>
+                <a:spcPct val="100000"/>
+              </a:lnSpc>
+              <a:spcBef>
+                <a:spcPts val="0"/>
+              </a:spcBef>
+              <a:spcAft>
+                <a:spcPts val="0"/>
+              </a:spcAft>
+              <a:buClr>
+                <a:srgbClr val="5A5A5A"/>
+              </a:buClr>
+              <a:buSzPts val="1000"/>
+              <a:buFont typeface="Arial"/>
+              <a:buNone/>
+            </a:pPr>
+            <a:r>
+              <a:rPr lang="ja-JP" sz="1000" b="0" i="0" u="none" strike="noStrike" cap="none">
+                <a:solidFill>
+                  <a:srgbClr val="5A5A5A"/>
+                </a:solidFill>
+                <a:latin typeface="Meiryo UI" panose="020B0604030504040204" pitchFamily="50" charset="-128"/>
+                <a:ea typeface="Meiryo UI" panose="020B0604030504040204" pitchFamily="50" charset="-128"/>
+                <a:sym typeface="Arial"/>
+              </a:rPr>
+              <a:t>各種条件について</a:t>
+            </a:r>
+            <a:endParaRPr>
+              <a:latin typeface="Meiryo UI" panose="020B0604030504040204" pitchFamily="50" charset="-128"/>
+              <a:ea typeface="Meiryo UI" panose="020B0604030504040204" pitchFamily="50" charset="-128"/>
+            </a:endParaRPr>
+          </a:p>
+        </p:txBody>
+      </p:sp>
+      <p:sp>
+        <p:nvSpPr>
+          <p:cNvPr id="206" name="Google Shape;206;p3">
+            <a:extLst>
+              <a:ext uri="{FF2B5EF4-FFF2-40B4-BE49-F238E27FC236}">
+                <a16:creationId xmlns:a16="http://schemas.microsoft.com/office/drawing/2014/main" id="{F61C6AC7-B337-2B5C-341B-656943B3C48C}"/>
+              </a:ext>
+            </a:extLst>
+          </p:cNvPr>
+          <p:cNvSpPr/>
+          <p:nvPr/>
+        </p:nvSpPr>
+        <p:spPr>
+          <a:xfrm>
+            <a:off x="0" y="116632"/>
+            <a:ext cx="323528" cy="180000"/>
+          </a:xfrm>
+          <a:prstGeom prst="parallelogram">
+            <a:avLst>
+              <a:gd name="adj" fmla="val 32938"/>
+            </a:avLst>
+          </a:prstGeom>
+          <a:solidFill>
+            <a:srgbClr val="66A09A"/>
+          </a:solidFill>
+          <a:ln>
+            <a:noFill/>
+          </a:ln>
+        </p:spPr>
+        <p:txBody>
+          <a:bodyPr spcFirstLastPara="1" wrap="square" lIns="0" tIns="0" rIns="0" bIns="0" anchor="ctr" anchorCtr="0">
+            <a:noAutofit/>
+          </a:bodyPr>
+          <a:lstStyle/>
+          <a:p>
+            <a:pPr marL="0" marR="0" lvl="0" indent="0" algn="ctr" rtl="0">
+              <a:lnSpc>
+                <a:spcPct val="100000"/>
+              </a:lnSpc>
+              <a:spcBef>
+                <a:spcPts val="0"/>
+              </a:spcBef>
+              <a:spcAft>
+                <a:spcPts val="0"/>
+              </a:spcAft>
+              <a:buClr>
+                <a:srgbClr val="FFFFFF"/>
+              </a:buClr>
+              <a:buSzPts val="1000"/>
+              <a:buFont typeface="Arial"/>
+              <a:buNone/>
+            </a:pPr>
+            <a:r>
+              <a:rPr lang="ja-JP" sz="1000" b="0" i="0" u="none" strike="noStrike" cap="none">
+                <a:solidFill>
+                  <a:srgbClr val="FFFFFF"/>
+                </a:solidFill>
+                <a:latin typeface="Arial"/>
+                <a:ea typeface="Arial"/>
+                <a:cs typeface="Arial"/>
+                <a:sym typeface="Arial"/>
+              </a:rPr>
+              <a:t>1</a:t>
+            </a:r>
+            <a:endParaRPr sz="1000" b="0" i="0" u="none" strike="noStrike" cap="none">
+              <a:solidFill>
+                <a:srgbClr val="FFFFFF"/>
+              </a:solidFill>
+              <a:latin typeface="Arial"/>
+              <a:ea typeface="Arial"/>
+              <a:cs typeface="Arial"/>
+              <a:sym typeface="Arial"/>
+            </a:endParaRPr>
+          </a:p>
+        </p:txBody>
+      </p:sp>
+      <p:sp>
+        <p:nvSpPr>
+          <p:cNvPr id="207" name="TextBox 206"/>
+          <p:cNvSpPr txBox="1"/>
+          <p:nvPr/>
+        </p:nvSpPr>
+        <p:spPr>
+          <a:xfrm>
+            <a:off x="265176" y="804672"/>
+            <a:ext cx="8631936" cy="274320"/>
+          </a:xfrm>
+          <a:prstGeom prst="rect">
+            <a:avLst/>
+          </a:prstGeom>
+          <a:noFill/>
+        </p:spPr>
+        <p:txBody>
+          <a:bodyPr wrap="square">
+            <a:spAutoFit/>
+          </a:bodyPr>
+          <a:lstStyle/>
+          <a:p>
+            <a:r>
+              <a:rPr sz="1300" b="1">
+                <a:solidFill>
+                  <a:srgbClr val="203864"/>
+                </a:solidFill>
+                <a:latin typeface="游ゴシック"/>
+              </a:rPr>
+              <a:t>非事業用資産（投資有価証券・保険積立金・車両）は新設分割により新設会社へ承継を想定（詳細 P.3〜5）</a:t>
+            </a:r>
+          </a:p>
+        </p:txBody>
+      </p:sp>
+      <p:sp>
+        <p:nvSpPr>
+          <p:cNvPr id="208" name="Oval 207"/>
+          <p:cNvSpPr/>
+          <p:nvPr/>
+        </p:nvSpPr>
+        <p:spPr>
+          <a:xfrm>
+            <a:off x="822960" y="1298448"/>
+            <a:ext cx="1737360" cy="530352"/>
+          </a:xfrm>
+          <a:prstGeom prst="ellipse">
+            <a:avLst/>
+          </a:prstGeom>
+          <a:solidFill>
+            <a:srgbClr val="BDD7EE"/>
+          </a:solidFill>
+          <a:ln w="12700">
+            <a:solidFill>
+              <a:srgbClr val="2E5496"/>
+            </a:solidFill>
+          </a:ln>
+          <a:effectLst/>
+        </p:spPr>
+        <p:style>
+          <a:lnRef idx="1">
+            <a:schemeClr val="accent1"/>
+          </a:lnRef>
+          <a:fillRef idx="3">
+            <a:schemeClr val="accent1"/>
+          </a:fillRef>
+          <a:effectRef idx="2">
+            <a:schemeClr val="accent1"/>
+          </a:effectRef>
+          <a:fontRef idx="minor">
+            <a:schemeClr val="lt1"/>
+          </a:fontRef>
+        </p:style>
+        <p:txBody>
+          <a:bodyPr rtlCol="0" anchor="ctr" wrap="square" lIns="0" rIns="0"/>
+          <a:lstStyle/>
+          <a:p>
+            <a:pPr algn="ctr"/>
+            <a:r>
+              <a:rPr sz="900">
+                <a:solidFill>
+                  <a:srgbClr val="203864"/>
+                </a:solidFill>
+                <a:latin typeface="游ゴシック"/>
+              </a:rPr>
+              <a:t>野口 紘 氏 ほか</a:t>
+            </a:r>
+          </a:p>
+        </p:txBody>
+      </p:sp>
+      <p:cxnSp>
+        <p:nvCxnSpPr>
+          <p:cNvPr id="209" name="Connector 208"/>
+          <p:cNvCxnSpPr/>
+          <p:nvPr/>
+        </p:nvCxnSpPr>
+        <p:spPr>
+          <a:xfrm>
+            <a:off x="1691640" y="1828800"/>
+            <a:ext cx="0" cy="566928"/>
+          </a:xfrm>
+          <a:prstGeom prst="line">
+            <a:avLst/>
+          </a:prstGeom>
+          <a:ln w="12700">
+            <a:solidFill>
+              <a:srgbClr val="595959"/>
+            </a:solidFill>
+          </a:ln>
+        </p:spPr>
+        <p:style>
+          <a:lnRef idx="2">
+            <a:schemeClr val="accent1"/>
+          </a:lnRef>
+          <a:fillRef idx="0">
+            <a:schemeClr val="accent1"/>
+          </a:fillRef>
+          <a:effectRef idx="1">
+            <a:schemeClr val="accent1"/>
+          </a:effectRef>
+          <a:fontRef idx="minor">
+            <a:schemeClr val="tx1"/>
+          </a:fontRef>
+        </p:style>
+      </p:cxnSp>
+      <p:sp>
+        <p:nvSpPr>
+          <p:cNvPr id="210" name="TextBox 209"/>
+          <p:cNvSpPr txBox="1"/>
+          <p:nvPr/>
+        </p:nvSpPr>
+        <p:spPr>
+          <a:xfrm>
+            <a:off x="1234440" y="1993392"/>
+            <a:ext cx="914400" cy="219456"/>
+          </a:xfrm>
+          <a:prstGeom prst="rect">
+            <a:avLst/>
+          </a:prstGeom>
+          <a:noFill/>
+        </p:spPr>
+        <p:txBody>
+          <a:bodyPr wrap="none">
+            <a:spAutoFit/>
+          </a:bodyPr>
+          <a:lstStyle/>
+          <a:p>
+            <a:pPr algn="ctr"/>
+            <a:r>
+              <a:rPr sz="900">
+                <a:solidFill>
+                  <a:srgbClr val="595959"/>
+                </a:solidFill>
+                <a:latin typeface="游ゴシック"/>
+              </a:rPr>
+              <a:t>100.0%</a:t>
+            </a:r>
+          </a:p>
+        </p:txBody>
+      </p:sp>
+      <p:sp>
+        <p:nvSpPr>
+          <p:cNvPr id="211" name="Rectangle 210"/>
+          <p:cNvSpPr/>
+          <p:nvPr/>
+        </p:nvSpPr>
+        <p:spPr>
+          <a:xfrm>
+            <a:off x="365760" y="2395728"/>
+            <a:ext cx="2651760" cy="2505456"/>
+          </a:xfrm>
+          <a:prstGeom prst="rect">
+            <a:avLst/>
+          </a:prstGeom>
+          <a:solidFill>
+            <a:srgbClr val="D9E2F3"/>
+          </a:solidFill>
+          <a:ln w="12700">
+            <a:solidFill>
+              <a:srgbClr val="2E5496"/>
+            </a:solidFill>
+          </a:ln>
+          <a:effectLst/>
+        </p:spPr>
+        <p:style>
+          <a:lnRef idx="1">
+            <a:schemeClr val="accent1"/>
+          </a:lnRef>
+          <a:fillRef idx="3">
+            <a:schemeClr val="accent1"/>
+          </a:fillRef>
+          <a:effectRef idx="2">
+            <a:schemeClr val="accent1"/>
+          </a:effectRef>
+          <a:fontRef idx="minor">
+            <a:schemeClr val="lt1"/>
+          </a:fontRef>
+        </p:style>
+        <p:txBody>
+          <a:bodyPr rtlCol="0" anchor="ctr"/>
+          <a:lstStyle/>
+          <a:p/>
+        </p:txBody>
+      </p:sp>
+      <p:sp>
+        <p:nvSpPr>
+          <p:cNvPr id="212" name="TextBox 211"/>
+          <p:cNvSpPr txBox="1"/>
+          <p:nvPr/>
+        </p:nvSpPr>
+        <p:spPr>
+          <a:xfrm>
+            <a:off x="365760" y="2450592"/>
+            <a:ext cx="2651760" cy="237744"/>
+          </a:xfrm>
+          <a:prstGeom prst="rect">
+            <a:avLst/>
+          </a:prstGeom>
+          <a:noFill/>
+        </p:spPr>
+        <p:txBody>
+          <a:bodyPr wrap="none">
+            <a:spAutoFit/>
+          </a:bodyPr>
+          <a:lstStyle/>
+          <a:p>
+            <a:pPr algn="ctr"/>
+            <a:r>
+              <a:rPr sz="1100" b="1" u="sng">
+                <a:solidFill>
+                  <a:srgbClr val="203864"/>
+                </a:solidFill>
+                <a:latin typeface="游ゴシック"/>
+              </a:rPr>
+              <a:t>株式会社カナリア</a:t>
+            </a:r>
+          </a:p>
+        </p:txBody>
+      </p:sp>
+      <p:sp>
+        <p:nvSpPr>
+          <p:cNvPr id="213" name="Rectangle 212"/>
+          <p:cNvSpPr/>
+          <p:nvPr/>
+        </p:nvSpPr>
+        <p:spPr>
+          <a:xfrm>
+            <a:off x="530352" y="2761488"/>
+            <a:ext cx="2322576" cy="566928"/>
+          </a:xfrm>
+          <a:prstGeom prst="rect">
+            <a:avLst/>
+          </a:prstGeom>
+          <a:solidFill>
+            <a:srgbClr val="203864"/>
+          </a:solidFill>
+          <a:ln>
+            <a:solidFill>
+              <a:srgbClr val="203864"/>
+            </a:solidFill>
+          </a:ln>
+          <a:effectLst/>
+        </p:spPr>
+        <p:style>
+          <a:lnRef idx="1">
+            <a:schemeClr val="accent1"/>
+          </a:lnRef>
+          <a:fillRef idx="3">
+            <a:schemeClr val="accent1"/>
+          </a:fillRef>
+          <a:effectRef idx="2">
+            <a:schemeClr val="accent1"/>
+          </a:effectRef>
+          <a:fontRef idx="minor">
+            <a:schemeClr val="lt1"/>
+          </a:fontRef>
+        </p:style>
+        <p:txBody>
+          <a:bodyPr rtlCol="0" anchor="ctr" wrap="square" tIns="0" bIns="0"/>
+          <a:lstStyle/>
+          <a:p>
+            <a:pPr algn="ctr"/>
+            <a:r>
+              <a:rPr sz="900" b="1">
+                <a:solidFill>
+                  <a:srgbClr val="FFFFFF"/>
+                </a:solidFill>
+                <a:latin typeface="游ゴシック"/>
+              </a:rPr>
+              <a:t>キャラクターグッズ企画・製造販売</a:t>
+            </a:r>
+          </a:p>
+          <a:p>
+            <a:pPr algn="ctr"/>
+            <a:r>
+              <a:rPr sz="900" b="1">
+                <a:solidFill>
+                  <a:srgbClr val="FFFFFF"/>
+                </a:solidFill>
+                <a:latin typeface="游ゴシック"/>
+              </a:rPr>
+              <a:t>（ライセンス／版権商品）</a:t>
+            </a:r>
+          </a:p>
+        </p:txBody>
+      </p:sp>
+      <p:sp>
+        <p:nvSpPr>
+          <p:cNvPr id="214" name="Rectangle 213"/>
+          <p:cNvSpPr/>
+          <p:nvPr/>
+        </p:nvSpPr>
+        <p:spPr>
+          <a:xfrm>
+            <a:off x="530352" y="3456432"/>
+            <a:ext cx="2322576" cy="566928"/>
+          </a:xfrm>
+          <a:prstGeom prst="rect">
+            <a:avLst/>
+          </a:prstGeom>
+          <a:solidFill>
+            <a:srgbClr val="203864"/>
+          </a:solidFill>
+          <a:ln>
+            <a:solidFill>
+              <a:srgbClr val="203864"/>
+            </a:solidFill>
+          </a:ln>
+          <a:effectLst/>
+        </p:spPr>
+        <p:style>
+          <a:lnRef idx="1">
+            <a:schemeClr val="accent1"/>
+          </a:lnRef>
+          <a:fillRef idx="3">
+            <a:schemeClr val="accent1"/>
+          </a:fillRef>
+          <a:effectRef idx="2">
+            <a:schemeClr val="accent1"/>
+          </a:effectRef>
+          <a:fontRef idx="minor">
+            <a:schemeClr val="lt1"/>
+          </a:fontRef>
+        </p:style>
+        <p:txBody>
+          <a:bodyPr rtlCol="0" anchor="ctr" wrap="square" tIns="0" bIns="0"/>
+          <a:lstStyle/>
+          <a:p>
+            <a:pPr algn="ctr"/>
+            <a:r>
+              <a:rPr sz="900" b="1">
+                <a:solidFill>
+                  <a:srgbClr val="FFFFFF"/>
+                </a:solidFill>
+                <a:latin typeface="游ゴシック"/>
+              </a:rPr>
+              <a:t>OEM受託事業</a:t>
+            </a:r>
+          </a:p>
+        </p:txBody>
+      </p:sp>
+      <p:sp>
+        <p:nvSpPr>
+          <p:cNvPr id="215" name="Rectangle 214"/>
+          <p:cNvSpPr/>
+          <p:nvPr/>
+        </p:nvSpPr>
+        <p:spPr>
+          <a:xfrm>
+            <a:off x="530352" y="4151376"/>
+            <a:ext cx="2322576" cy="566928"/>
+          </a:xfrm>
+          <a:prstGeom prst="rect">
+            <a:avLst/>
+          </a:prstGeom>
+          <a:solidFill>
+            <a:srgbClr val="203864"/>
+          </a:solidFill>
+          <a:ln>
+            <a:solidFill>
+              <a:srgbClr val="203864"/>
+            </a:solidFill>
+          </a:ln>
+          <a:effectLst/>
+        </p:spPr>
+        <p:style>
+          <a:lnRef idx="1">
+            <a:schemeClr val="accent1"/>
+          </a:lnRef>
+          <a:fillRef idx="3">
+            <a:schemeClr val="accent1"/>
+          </a:fillRef>
+          <a:effectRef idx="2">
+            <a:schemeClr val="accent1"/>
+          </a:effectRef>
+          <a:fontRef idx="minor">
+            <a:schemeClr val="lt1"/>
+          </a:fontRef>
+        </p:style>
+        <p:txBody>
+          <a:bodyPr rtlCol="0" anchor="ctr" wrap="square" tIns="0" bIns="0"/>
+          <a:lstStyle/>
+          <a:p>
+            <a:pPr algn="ctr"/>
+            <a:r>
+              <a:rPr sz="900" b="1">
+                <a:solidFill>
+                  <a:srgbClr val="FFFFFF"/>
+                </a:solidFill>
+                <a:latin typeface="游ゴシック"/>
+              </a:rPr>
+              <a:t>非事業用資産の保有</a:t>
+            </a:r>
+          </a:p>
+          <a:p>
+            <a:pPr algn="ctr"/>
+            <a:r>
+              <a:rPr sz="900" b="1">
+                <a:solidFill>
+                  <a:srgbClr val="FFFFFF"/>
+                </a:solidFill>
+                <a:latin typeface="游ゴシック"/>
+              </a:rPr>
+              <a:t>（投資有価証券・保険積立金・車両）</a:t>
+            </a:r>
+          </a:p>
+        </p:txBody>
+      </p:sp>
+      <p:sp>
+        <p:nvSpPr>
+          <p:cNvPr id="216" name="Right Arrow 215"/>
+          <p:cNvSpPr/>
+          <p:nvPr/>
+        </p:nvSpPr>
+        <p:spPr>
+          <a:xfrm>
+            <a:off x="3310128" y="3017520"/>
+            <a:ext cx="731520" cy="1005840"/>
+          </a:xfrm>
+          <a:prstGeom prst="rightArrow">
+            <a:avLst/>
+          </a:prstGeom>
+          <a:solidFill>
+            <a:srgbClr val="D9E2F3"/>
+          </a:solidFill>
+          <a:ln>
+            <a:solidFill>
+              <a:srgbClr val="203864"/>
+            </a:solidFill>
+          </a:ln>
+          <a:effectLst/>
+        </p:spPr>
+        <p:style>
+          <a:lnRef idx="1">
+            <a:schemeClr val="accent1"/>
+          </a:lnRef>
+          <a:fillRef idx="3">
+            <a:schemeClr val="accent1"/>
+          </a:fillRef>
+          <a:effectRef idx="2">
+            <a:schemeClr val="accent1"/>
+          </a:effectRef>
+          <a:fontRef idx="minor">
+            <a:schemeClr val="lt1"/>
+          </a:fontRef>
+        </p:style>
+        <p:txBody>
+          <a:bodyPr rtlCol="0" anchor="ctr"/>
+          <a:lstStyle/>
+          <a:p/>
+        </p:txBody>
+      </p:sp>
+      <p:sp>
+        <p:nvSpPr>
+          <p:cNvPr id="217" name="Oval 216"/>
+          <p:cNvSpPr/>
+          <p:nvPr/>
+        </p:nvSpPr>
+        <p:spPr>
+          <a:xfrm>
+            <a:off x="5806440" y="1207008"/>
+            <a:ext cx="1737360" cy="530352"/>
+          </a:xfrm>
+          <a:prstGeom prst="ellipse">
+            <a:avLst/>
+          </a:prstGeom>
+          <a:solidFill>
+            <a:srgbClr val="BDD7EE"/>
+          </a:solidFill>
+          <a:ln w="12700">
+            <a:solidFill>
+              <a:srgbClr val="2E5496"/>
+            </a:solidFill>
+          </a:ln>
+          <a:effectLst/>
+        </p:spPr>
+        <p:style>
+          <a:lnRef idx="1">
+            <a:schemeClr val="accent1"/>
+          </a:lnRef>
+          <a:fillRef idx="3">
+            <a:schemeClr val="accent1"/>
+          </a:fillRef>
+          <a:effectRef idx="2">
+            <a:schemeClr val="accent1"/>
+          </a:effectRef>
+          <a:fontRef idx="minor">
+            <a:schemeClr val="lt1"/>
+          </a:fontRef>
+        </p:style>
+        <p:txBody>
+          <a:bodyPr rtlCol="0" anchor="ctr" wrap="square" lIns="0" rIns="0"/>
+          <a:lstStyle/>
+          <a:p>
+            <a:pPr algn="ctr"/>
+            <a:r>
+              <a:rPr sz="900">
+                <a:solidFill>
+                  <a:srgbClr val="203864"/>
+                </a:solidFill>
+                <a:latin typeface="游ゴシック"/>
+              </a:rPr>
+              <a:t>譲受企業</a:t>
+            </a:r>
+          </a:p>
+        </p:txBody>
+      </p:sp>
+      <p:cxnSp>
+        <p:nvCxnSpPr>
+          <p:cNvPr id="218" name="Connector 217"/>
+          <p:cNvCxnSpPr/>
+          <p:nvPr/>
+        </p:nvCxnSpPr>
+        <p:spPr>
+          <a:xfrm>
+            <a:off x="6675120" y="1737360"/>
+            <a:ext cx="0" cy="384048"/>
+          </a:xfrm>
+          <a:prstGeom prst="line">
+            <a:avLst/>
+          </a:prstGeom>
+          <a:ln w="12700">
+            <a:solidFill>
+              <a:srgbClr val="595959"/>
+            </a:solidFill>
+          </a:ln>
+        </p:spPr>
+        <p:style>
+          <a:lnRef idx="2">
+            <a:schemeClr val="accent1"/>
+          </a:lnRef>
+          <a:fillRef idx="0">
+            <a:schemeClr val="accent1"/>
+          </a:fillRef>
+          <a:effectRef idx="1">
+            <a:schemeClr val="accent1"/>
+          </a:effectRef>
+          <a:fontRef idx="minor">
+            <a:schemeClr val="tx1"/>
+          </a:fontRef>
+        </p:style>
+      </p:cxnSp>
+      <p:sp>
+        <p:nvSpPr>
+          <p:cNvPr id="219" name="TextBox 218"/>
+          <p:cNvSpPr txBox="1"/>
+          <p:nvPr/>
+        </p:nvSpPr>
+        <p:spPr>
+          <a:xfrm>
+            <a:off x="6217920" y="1810512"/>
+            <a:ext cx="914400" cy="219456"/>
+          </a:xfrm>
+          <a:prstGeom prst="rect">
+            <a:avLst/>
+          </a:prstGeom>
+          <a:noFill/>
+        </p:spPr>
+        <p:txBody>
+          <a:bodyPr wrap="none">
+            <a:spAutoFit/>
+          </a:bodyPr>
+          <a:lstStyle/>
+          <a:p>
+            <a:pPr algn="ctr"/>
+            <a:r>
+              <a:rPr sz="900">
+                <a:solidFill>
+                  <a:srgbClr val="595959"/>
+                </a:solidFill>
+                <a:latin typeface="游ゴシック"/>
+              </a:rPr>
+              <a:t>100.0%</a:t>
+            </a:r>
+          </a:p>
+        </p:txBody>
+      </p:sp>
+      <p:sp>
+        <p:nvSpPr>
+          <p:cNvPr id="220" name="Rectangle 219"/>
+          <p:cNvSpPr/>
+          <p:nvPr/>
+        </p:nvSpPr>
+        <p:spPr>
+          <a:xfrm>
+            <a:off x="4617720" y="2121408"/>
+            <a:ext cx="4114800" cy="1572768"/>
+          </a:xfrm>
+          <a:prstGeom prst="rect">
+            <a:avLst/>
+          </a:prstGeom>
+          <a:solidFill>
+            <a:srgbClr val="D9E2F3"/>
+          </a:solidFill>
+          <a:ln w="12700">
+            <a:solidFill>
+              <a:srgbClr val="2E5496"/>
+            </a:solidFill>
+          </a:ln>
+          <a:effectLst/>
+        </p:spPr>
+        <p:style>
+          <a:lnRef idx="1">
+            <a:schemeClr val="accent1"/>
+          </a:lnRef>
+          <a:fillRef idx="3">
+            <a:schemeClr val="accent1"/>
+          </a:fillRef>
+          <a:effectRef idx="2">
+            <a:schemeClr val="accent1"/>
+          </a:effectRef>
+          <a:fontRef idx="minor">
+            <a:schemeClr val="lt1"/>
+          </a:fontRef>
+        </p:style>
+        <p:txBody>
+          <a:bodyPr rtlCol="0" anchor="ctr"/>
+          <a:lstStyle/>
+          <a:p/>
+        </p:txBody>
+      </p:sp>
+      <p:sp>
+        <p:nvSpPr>
+          <p:cNvPr id="221" name="TextBox 220"/>
+          <p:cNvSpPr txBox="1"/>
+          <p:nvPr/>
+        </p:nvSpPr>
+        <p:spPr>
+          <a:xfrm>
+            <a:off x="4617720" y="2176272"/>
+            <a:ext cx="4114800" cy="237744"/>
+          </a:xfrm>
+          <a:prstGeom prst="rect">
+            <a:avLst/>
+          </a:prstGeom>
+          <a:noFill/>
+        </p:spPr>
+        <p:txBody>
+          <a:bodyPr wrap="none">
+            <a:spAutoFit/>
+          </a:bodyPr>
+          <a:lstStyle/>
+          <a:p>
+            <a:pPr algn="ctr"/>
+            <a:r>
+              <a:rPr sz="1100" b="1" u="sng">
+                <a:solidFill>
+                  <a:srgbClr val="203864"/>
+                </a:solidFill>
+                <a:latin typeface="游ゴシック"/>
+              </a:rPr>
+              <a:t>株式会社カナリア</a:t>
+            </a:r>
+          </a:p>
+        </p:txBody>
+      </p:sp>
+      <p:sp>
+        <p:nvSpPr>
+          <p:cNvPr id="222" name="Rectangle 221"/>
+          <p:cNvSpPr/>
+          <p:nvPr/>
+        </p:nvSpPr>
+        <p:spPr>
+          <a:xfrm>
+            <a:off x="4782312" y="2487168"/>
+            <a:ext cx="3785615" cy="384048"/>
+          </a:xfrm>
+          <a:prstGeom prst="rect">
+            <a:avLst/>
+          </a:prstGeom>
+          <a:solidFill>
+            <a:srgbClr val="203864"/>
+          </a:solidFill>
+          <a:ln>
+            <a:solidFill>
+              <a:srgbClr val="203864"/>
+            </a:solidFill>
+          </a:ln>
+          <a:effectLst/>
+        </p:spPr>
+        <p:style>
+          <a:lnRef idx="1">
+            <a:schemeClr val="accent1"/>
+          </a:lnRef>
+          <a:fillRef idx="3">
+            <a:schemeClr val="accent1"/>
+          </a:fillRef>
+          <a:effectRef idx="2">
+            <a:schemeClr val="accent1"/>
+          </a:effectRef>
+          <a:fontRef idx="minor">
+            <a:schemeClr val="lt1"/>
+          </a:fontRef>
+        </p:style>
+        <p:txBody>
+          <a:bodyPr rtlCol="0" anchor="ctr" wrap="square" tIns="0" bIns="0"/>
+          <a:lstStyle/>
+          <a:p>
+            <a:pPr algn="ctr"/>
+            <a:r>
+              <a:rPr sz="900" b="1">
+                <a:solidFill>
+                  <a:srgbClr val="FFFFFF"/>
+                </a:solidFill>
+                <a:latin typeface="游ゴシック"/>
+              </a:rPr>
+              <a:t>キャラクターグッズ企画・製造販売（ライセンス）</a:t>
+            </a:r>
+          </a:p>
+        </p:txBody>
+      </p:sp>
+      <p:sp>
+        <p:nvSpPr>
+          <p:cNvPr id="223" name="Rectangle 222"/>
+          <p:cNvSpPr/>
+          <p:nvPr/>
+        </p:nvSpPr>
+        <p:spPr>
+          <a:xfrm>
+            <a:off x="4782312" y="2980944"/>
+            <a:ext cx="3785615" cy="384048"/>
+          </a:xfrm>
+          <a:prstGeom prst="rect">
+            <a:avLst/>
+          </a:prstGeom>
+          <a:solidFill>
+            <a:srgbClr val="203864"/>
+          </a:solidFill>
+          <a:ln>
+            <a:solidFill>
+              <a:srgbClr val="203864"/>
+            </a:solidFill>
+          </a:ln>
+          <a:effectLst/>
+        </p:spPr>
+        <p:style>
+          <a:lnRef idx="1">
+            <a:schemeClr val="accent1"/>
+          </a:lnRef>
+          <a:fillRef idx="3">
+            <a:schemeClr val="accent1"/>
+          </a:fillRef>
+          <a:effectRef idx="2">
+            <a:schemeClr val="accent1"/>
+          </a:effectRef>
+          <a:fontRef idx="minor">
+            <a:schemeClr val="lt1"/>
+          </a:fontRef>
+        </p:style>
+        <p:txBody>
+          <a:bodyPr rtlCol="0" anchor="ctr" wrap="square" tIns="0" bIns="0"/>
+          <a:lstStyle/>
+          <a:p>
+            <a:pPr algn="ctr"/>
+            <a:r>
+              <a:rPr sz="900" b="1">
+                <a:solidFill>
+                  <a:srgbClr val="FFFFFF"/>
+                </a:solidFill>
+                <a:latin typeface="游ゴシック"/>
+              </a:rPr>
+              <a:t>OEM受託事業</a:t>
+            </a:r>
+          </a:p>
+        </p:txBody>
+      </p:sp>
+      <p:cxnSp>
+        <p:nvCxnSpPr>
+          <p:cNvPr id="224" name="Connector 223"/>
+          <p:cNvCxnSpPr/>
+          <p:nvPr/>
+        </p:nvCxnSpPr>
+        <p:spPr>
+          <a:xfrm>
+            <a:off x="4343400" y="3950208"/>
+            <a:ext cx="4572000" cy="0"/>
+          </a:xfrm>
+          <a:prstGeom prst="line">
+            <a:avLst/>
+          </a:prstGeom>
+          <a:ln w="15875">
+            <a:solidFill>
+              <a:srgbClr val="203864"/>
+            </a:solidFill>
+          </a:ln>
+        </p:spPr>
+        <p:style>
+          <a:lnRef idx="2">
+            <a:schemeClr val="accent1"/>
+          </a:lnRef>
+          <a:fillRef idx="0">
+            <a:schemeClr val="accent1"/>
+          </a:fillRef>
+          <a:effectRef idx="1">
+            <a:schemeClr val="accent1"/>
+          </a:effectRef>
+          <a:fontRef idx="minor">
+            <a:schemeClr val="tx1"/>
+          </a:fontRef>
+        </p:style>
+      </p:cxnSp>
+      <p:sp>
+        <p:nvSpPr>
+          <p:cNvPr id="225" name="Oval 224"/>
+          <p:cNvSpPr/>
+          <p:nvPr/>
+        </p:nvSpPr>
+        <p:spPr>
+          <a:xfrm>
+            <a:off x="5806440" y="4224528"/>
+            <a:ext cx="1737360" cy="530352"/>
+          </a:xfrm>
+          <a:prstGeom prst="ellipse">
+            <a:avLst/>
+          </a:prstGeom>
+          <a:solidFill>
+            <a:srgbClr val="BDD7EE"/>
+          </a:solidFill>
+          <a:ln w="12700">
+            <a:solidFill>
+              <a:srgbClr val="2E5496"/>
+            </a:solidFill>
+          </a:ln>
+          <a:effectLst/>
+        </p:spPr>
+        <p:style>
+          <a:lnRef idx="1">
+            <a:schemeClr val="accent1"/>
+          </a:lnRef>
+          <a:fillRef idx="3">
+            <a:schemeClr val="accent1"/>
+          </a:fillRef>
+          <a:effectRef idx="2">
+            <a:schemeClr val="accent1"/>
+          </a:effectRef>
+          <a:fontRef idx="minor">
+            <a:schemeClr val="lt1"/>
+          </a:fontRef>
+        </p:style>
+        <p:txBody>
+          <a:bodyPr rtlCol="0" anchor="ctr" wrap="square" lIns="0" rIns="0"/>
+          <a:lstStyle/>
+          <a:p>
+            <a:pPr algn="ctr"/>
+            <a:r>
+              <a:rPr sz="900">
+                <a:solidFill>
+                  <a:srgbClr val="203864"/>
+                </a:solidFill>
+                <a:latin typeface="游ゴシック"/>
+              </a:rPr>
+              <a:t>野口 紘 氏 ほか</a:t>
+            </a:r>
+          </a:p>
+        </p:txBody>
+      </p:sp>
+      <p:cxnSp>
+        <p:nvCxnSpPr>
+          <p:cNvPr id="226" name="Connector 225"/>
+          <p:cNvCxnSpPr/>
+          <p:nvPr/>
+        </p:nvCxnSpPr>
+        <p:spPr>
+          <a:xfrm>
+            <a:off x="6675120" y="4754880"/>
+            <a:ext cx="0" cy="384048"/>
+          </a:xfrm>
+          <a:prstGeom prst="line">
+            <a:avLst/>
+          </a:prstGeom>
+          <a:ln w="12700">
+            <a:solidFill>
+              <a:srgbClr val="595959"/>
+            </a:solidFill>
+          </a:ln>
+        </p:spPr>
+        <p:style>
+          <a:lnRef idx="2">
+            <a:schemeClr val="accent1"/>
+          </a:lnRef>
+          <a:fillRef idx="0">
+            <a:schemeClr val="accent1"/>
+          </a:fillRef>
+          <a:effectRef idx="1">
+            <a:schemeClr val="accent1"/>
+          </a:effectRef>
+          <a:fontRef idx="minor">
+            <a:schemeClr val="tx1"/>
+          </a:fontRef>
+        </p:style>
+      </p:cxnSp>
+      <p:sp>
+        <p:nvSpPr>
+          <p:cNvPr id="227" name="TextBox 226"/>
+          <p:cNvSpPr txBox="1"/>
+          <p:nvPr/>
+        </p:nvSpPr>
+        <p:spPr>
+          <a:xfrm>
+            <a:off x="6217920" y="4828032"/>
+            <a:ext cx="914400" cy="219456"/>
+          </a:xfrm>
+          <a:prstGeom prst="rect">
+            <a:avLst/>
+          </a:prstGeom>
+          <a:noFill/>
+        </p:spPr>
+        <p:txBody>
+          <a:bodyPr wrap="none">
+            <a:spAutoFit/>
+          </a:bodyPr>
+          <a:lstStyle/>
+          <a:p>
+            <a:pPr algn="ctr"/>
+            <a:r>
+              <a:rPr sz="900">
+                <a:solidFill>
+                  <a:srgbClr val="595959"/>
+                </a:solidFill>
+                <a:latin typeface="游ゴシック"/>
+              </a:rPr>
+              <a:t>100.0%</a:t>
+            </a:r>
+          </a:p>
+        </p:txBody>
+      </p:sp>
+      <p:sp>
+        <p:nvSpPr>
+          <p:cNvPr id="228" name="Rectangle 227"/>
+          <p:cNvSpPr/>
+          <p:nvPr/>
+        </p:nvSpPr>
+        <p:spPr>
+          <a:xfrm>
+            <a:off x="4617720" y="5138928"/>
+            <a:ext cx="4114800" cy="1188720"/>
+          </a:xfrm>
+          <a:prstGeom prst="rect">
+            <a:avLst/>
+          </a:prstGeom>
+          <a:solidFill>
+            <a:srgbClr val="D9E2F3"/>
+          </a:solidFill>
+          <a:ln w="12700">
+            <a:solidFill>
+              <a:srgbClr val="2E5496"/>
+            </a:solidFill>
+          </a:ln>
+          <a:effectLst/>
+        </p:spPr>
+        <p:style>
+          <a:lnRef idx="1">
+            <a:schemeClr val="accent1"/>
+          </a:lnRef>
+          <a:fillRef idx="3">
+            <a:schemeClr val="accent1"/>
+          </a:fillRef>
+          <a:effectRef idx="2">
+            <a:schemeClr val="accent1"/>
+          </a:effectRef>
+          <a:fontRef idx="minor">
+            <a:schemeClr val="lt1"/>
+          </a:fontRef>
+        </p:style>
+        <p:txBody>
+          <a:bodyPr rtlCol="0" anchor="ctr"/>
+          <a:lstStyle/>
+          <a:p/>
+        </p:txBody>
+      </p:sp>
+      <p:sp>
+        <p:nvSpPr>
+          <p:cNvPr id="229" name="TextBox 228"/>
+          <p:cNvSpPr txBox="1"/>
+          <p:nvPr/>
+        </p:nvSpPr>
+        <p:spPr>
+          <a:xfrm>
+            <a:off x="4617720" y="5193792"/>
+            <a:ext cx="4114800" cy="237744"/>
+          </a:xfrm>
+          <a:prstGeom prst="rect">
+            <a:avLst/>
+          </a:prstGeom>
+          <a:noFill/>
+        </p:spPr>
+        <p:txBody>
+          <a:bodyPr wrap="none">
+            <a:spAutoFit/>
+          </a:bodyPr>
+          <a:lstStyle/>
+          <a:p>
+            <a:pPr algn="ctr"/>
+            <a:r>
+              <a:rPr sz="1100" b="1" u="sng">
+                <a:solidFill>
+                  <a:srgbClr val="203864"/>
+                </a:solidFill>
+                <a:latin typeface="游ゴシック"/>
+              </a:rPr>
+              <a:t>新設会社（会社分割により新設）</a:t>
+            </a:r>
+          </a:p>
+        </p:txBody>
+      </p:sp>
+      <p:sp>
+        <p:nvSpPr>
+          <p:cNvPr id="230" name="Rectangle 229"/>
+          <p:cNvSpPr/>
+          <p:nvPr/>
+        </p:nvSpPr>
+        <p:spPr>
+          <a:xfrm>
+            <a:off x="4782312" y="5504688"/>
+            <a:ext cx="3785615" cy="566928"/>
+          </a:xfrm>
+          <a:prstGeom prst="rect">
+            <a:avLst/>
+          </a:prstGeom>
+          <a:solidFill>
+            <a:srgbClr val="203864"/>
+          </a:solidFill>
+          <a:ln>
+            <a:solidFill>
+              <a:srgbClr val="203864"/>
+            </a:solidFill>
+          </a:ln>
+          <a:effectLst/>
+        </p:spPr>
+        <p:style>
+          <a:lnRef idx="1">
+            <a:schemeClr val="accent1"/>
+          </a:lnRef>
+          <a:fillRef idx="3">
+            <a:schemeClr val="accent1"/>
+          </a:fillRef>
+          <a:effectRef idx="2">
+            <a:schemeClr val="accent1"/>
+          </a:effectRef>
+          <a:fontRef idx="minor">
+            <a:schemeClr val="lt1"/>
+          </a:fontRef>
+        </p:style>
+        <p:txBody>
+          <a:bodyPr rtlCol="0" anchor="ctr" wrap="square" tIns="0" bIns="0"/>
+          <a:lstStyle/>
+          <a:p>
+            <a:pPr algn="ctr"/>
+            <a:r>
+              <a:rPr sz="900" b="1">
+                <a:solidFill>
+                  <a:srgbClr val="FFFFFF"/>
+                </a:solidFill>
+                <a:latin typeface="游ゴシック"/>
+              </a:rPr>
+              <a:t>非事業用資産の保有</a:t>
+            </a:r>
+          </a:p>
+          <a:p>
+            <a:pPr algn="ctr"/>
+            <a:r>
+              <a:rPr sz="900" b="1">
+                <a:solidFill>
+                  <a:srgbClr val="FFFFFF"/>
+                </a:solidFill>
+                <a:latin typeface="游ゴシック"/>
+              </a:rPr>
+              <a:t>（投資有価証券・保険積立金・車両）</a:t>
+            </a:r>
+          </a:p>
+        </p:txBody>
+      </p:sp>
+      <p:sp>
+        <p:nvSpPr>
+          <p:cNvPr id="231" name="TextBox 230"/>
+          <p:cNvSpPr txBox="1"/>
+          <p:nvPr/>
+        </p:nvSpPr>
+        <p:spPr>
+          <a:xfrm>
+            <a:off x="265176" y="6400800"/>
+            <a:ext cx="8631936" cy="365760"/>
+          </a:xfrm>
+          <a:prstGeom prst="rect">
+            <a:avLst/>
+          </a:prstGeom>
+          <a:noFill/>
+        </p:spPr>
+        <p:txBody>
+          <a:bodyPr wrap="square">
+            <a:spAutoFit/>
+          </a:bodyPr>
+          <a:lstStyle/>
+          <a:p>
+            <a:r>
+              <a:rPr sz="800">
+                <a:solidFill>
+                  <a:srgbClr val="595959"/>
+                </a:solidFill>
+                <a:latin typeface="游ゴシック"/>
+              </a:rPr>
+              <a:t>※ 株主構成は株主名簿の受領後に確定します（登記簿上の役員は野口 紘 氏・野口 文枝 氏・野口 聰江 氏の3名）。</a:t>
+            </a:r>
+          </a:p>
+          <a:p>
+            <a:r>
+              <a:rPr sz="800">
+                <a:solidFill>
+                  <a:srgbClr val="595959"/>
+                </a:solidFill>
+                <a:latin typeface="游ゴシック"/>
+              </a:rPr>
+              <a:t>※ 分割の形態（分割型／分社型）及び分割対象資産の範囲は、売主様のご意向及び税務上の適格要件を踏まえ、今後の協議事項となります。</a:t>
+            </a:r>
+          </a:p>
+        </p:txBody>
+      </p:sp>
+    </p:spTree>
+    <p:extLst>
+      <p:ext uri="{BB962C8B-B14F-4D97-AF65-F5344CB8AC3E}">
+        <p14:creationId xmlns:p14="http://schemas.microsoft.com/office/powerpoint/2010/main" val="705959670"/>
+      </p:ext>
+    </p:extLst>
+  </p:cSld>
+  <p:clrMapOvr>
+    <a:masterClrMapping/>
+  </p:clrMapOvr>
+</p:sld>
+</file>
+
+<file path=ppt/slides/slide3.xml><?xml version="1.0" encoding="utf-8"?>
+<p:sld xmlns:a="http://schemas.openxmlformats.org/drawingml/2006/main" xmlns:r="http://schemas.openxmlformats.org/officeDocument/2006/relationships" xmlns:p="http://schemas.openxmlformats.org/presentationml/2006/main">
+  <p:cSld>
+    <p:spTree>
+      <p:nvGrpSpPr>
+        <p:cNvPr id="1" name="Shape 203">
+          <a:extLst>
+            <a:ext uri="{FF2B5EF4-FFF2-40B4-BE49-F238E27FC236}">
+              <a16:creationId xmlns:a16="http://schemas.microsoft.com/office/drawing/2014/main" id="{303ADE12-6534-2DD0-54DD-3CEC85AAD073}"/>
+            </a:ext>
+          </a:extLst>
+        </p:cNvPr>
+        <p:cNvGrpSpPr/>
+        <p:nvPr/>
+      </p:nvGrpSpPr>
+      <p:grpSpPr>
+        <a:xfrm>
+          <a:off x="0" y="0"/>
+          <a:ext cx="0" cy="0"/>
+          <a:chOff x="0" y="0"/>
+          <a:chExt cx="0" cy="0"/>
+        </a:xfrm>
+      </p:grpSpPr>
+      <p:sp>
+        <p:nvSpPr>
+          <p:cNvPr id="204" name="Google Shape;204;p3">
+            <a:extLst>
+              <a:ext uri="{FF2B5EF4-FFF2-40B4-BE49-F238E27FC236}">
+                <a16:creationId xmlns:a16="http://schemas.microsoft.com/office/drawing/2014/main" id="{42B8BC1C-2CE3-92AA-4060-C70061419C20}"/>
+              </a:ext>
+            </a:extLst>
+          </p:cNvPr>
+          <p:cNvSpPr txBox="1">
+            <a:spLocks noGrp="1"/>
+          </p:cNvSpPr>
+          <p:nvPr>
+            <p:ph type="title"/>
+          </p:nvPr>
+        </p:nvSpPr>
+        <p:spPr>
+          <a:xfrm>
+            <a:off x="395536" y="332655"/>
+            <a:ext cx="6696744" cy="288033"/>
+          </a:xfrm>
+          <a:prstGeom prst="rect">
+            <a:avLst/>
+          </a:prstGeom>
+          <a:noFill/>
+          <a:ln>
+            <a:noFill/>
+          </a:ln>
+        </p:spPr>
+        <p:txBody>
+          <a:bodyPr spcFirstLastPara="1" wrap="square" lIns="91425" tIns="45700" rIns="91425" bIns="45700" anchor="ctr" anchorCtr="0">
+            <a:noAutofit/>
+          </a:bodyPr>
+          <a:lstStyle/>
+          <a:p>
+            <a:pPr lvl="0"/>
+            <a:r>
+              <a:rPr lang="ja-JP" altLang="en-US" dirty="0">
+                <a:solidFill>
+                  <a:srgbClr val="5A5A5A"/>
+                </a:solidFill>
+                <a:latin typeface="Meiryo UI" panose="020B0604030504040204" pitchFamily="50" charset="-128"/>
+                <a:ea typeface="Meiryo UI" panose="020B0604030504040204" pitchFamily="50" charset="-128"/>
+              </a:rPr>
               <a:t>分割対象資産の確認</a:t>
             </a:r>
             <a:endParaRPr b="1" dirty="0">
@@ -11768,7 +13140,7 @@
 </p:sld>
 </file>
 
-<file path=ppt/slides/slide3.xml><?xml version="1.0" encoding="utf-8"?>
+<file path=ppt/slides/slide4.xml><?xml version="1.0" encoding="utf-8"?>
 <p:sld xmlns:a="http://schemas.openxmlformats.org/drawingml/2006/main" xmlns:r="http://schemas.openxmlformats.org/officeDocument/2006/relationships" xmlns:p="http://schemas.openxmlformats.org/presentationml/2006/main">
   <p:cSld>
     <p:spTree>
@@ -12864,7 +14236,7 @@
 </p:sld>
 </file>
 
-<file path=ppt/slides/slide4.xml><?xml version="1.0" encoding="utf-8"?>
+<file path=ppt/slides/slide5.xml><?xml version="1.0" encoding="utf-8"?>
 <p:sld xmlns:a="http://schemas.openxmlformats.org/drawingml/2006/main" xmlns:r="http://schemas.openxmlformats.org/officeDocument/2006/relationships" xmlns:p="http://schemas.openxmlformats.org/presentationml/2006/main">
   <p:cSld>
     <p:spTree>
